--- a/Zeroth_review.pptx
+++ b/Zeroth_review.pptx
@@ -5,10 +5,11 @@
     <p:sldMasterId id="2147483660" r:id="rId1"/>
   </p:sldMasterIdLst>
   <p:sldIdLst>
-    <p:sldId id="258" r:id="rId2"/>
-    <p:sldId id="259" r:id="rId3"/>
-    <p:sldId id="260" r:id="rId4"/>
-    <p:sldId id="261" r:id="rId5"/>
+    <p:sldId id="262" r:id="rId2"/>
+    <p:sldId id="258" r:id="rId3"/>
+    <p:sldId id="259" r:id="rId4"/>
+    <p:sldId id="260" r:id="rId5"/>
+    <p:sldId id="261" r:id="rId6"/>
   </p:sldIdLst>
   <p:sldSz cx="12192000" cy="6858000"/>
   <p:notesSz cx="6858000" cy="9144000"/>
@@ -2981,6 +2982,13 @@
             <a:schemeClr val="lt1"/>
           </a:fontRef>
         </p:style>
+        <p:txBody>
+          <a:bodyPr/>
+          <a:lstStyle/>
+          <a:p>
+            <a:endParaRPr lang="en-IN"/>
+          </a:p>
+        </p:txBody>
       </p:sp>
       <p:pic>
         <p:nvPicPr>
@@ -3632,6 +3640,89 @@
           <p:cNvPr id="2" name="TextBox 1">
             <a:extLst>
               <a:ext uri="{FF2B5EF4-FFF2-40B4-BE49-F238E27FC236}">
+                <a16:creationId xmlns:a16="http://schemas.microsoft.com/office/drawing/2014/main" id="{F7E866A1-7791-91A0-7B3A-3BA31CAF0DC0}"/>
+              </a:ext>
+            </a:extLst>
+          </p:cNvPr>
+          <p:cNvSpPr txBox="1"/>
+          <p:nvPr/>
+        </p:nvSpPr>
+        <p:spPr>
+          <a:xfrm>
+            <a:off x="3422073" y="1745673"/>
+            <a:ext cx="5347854" cy="2062103"/>
+          </a:xfrm>
+          <a:prstGeom prst="rect">
+            <a:avLst/>
+          </a:prstGeom>
+          <a:noFill/>
+        </p:spPr>
+        <p:txBody>
+          <a:bodyPr wrap="square" rtlCol="0">
+            <a:spAutoFit/>
+          </a:bodyPr>
+          <a:lstStyle/>
+          <a:p>
+            <a:r>
+              <a:rPr lang="en-IN" sz="3200" dirty="0"/>
+              <a:t>NAME : INDUJA K</a:t>
+            </a:r>
+          </a:p>
+          <a:p>
+            <a:r>
+              <a:rPr lang="en-IN" sz="3200" dirty="0"/>
+              <a:t>REG NO :  T9921</a:t>
+            </a:r>
+          </a:p>
+          <a:p>
+            <a:r>
+              <a:rPr lang="en-IN" sz="3200" dirty="0"/>
+              <a:t>COLLEGE : VIT VELLORE</a:t>
+            </a:r>
+          </a:p>
+          <a:p>
+            <a:r>
+              <a:rPr lang="en-IN" sz="3200" dirty="0"/>
+              <a:t>COURSE : M.TECH (AIML)</a:t>
+            </a:r>
+          </a:p>
+        </p:txBody>
+      </p:sp>
+    </p:spTree>
+    <p:extLst>
+      <p:ext uri="{BB962C8B-B14F-4D97-AF65-F5344CB8AC3E}">
+        <p14:creationId xmlns:p14="http://schemas.microsoft.com/office/powerpoint/2010/main" val="1889417799"/>
+      </p:ext>
+    </p:extLst>
+  </p:cSld>
+  <p:clrMapOvr>
+    <a:masterClrMapping/>
+  </p:clrMapOvr>
+</p:sld>
+</file>
+
+<file path=ppt/slides/slide2.xml><?xml version="1.0" encoding="utf-8"?>
+<p:sld xmlns:a="http://schemas.openxmlformats.org/drawingml/2006/main" xmlns:r="http://schemas.openxmlformats.org/officeDocument/2006/relationships" xmlns:p="http://schemas.openxmlformats.org/presentationml/2006/main">
+  <p:cSld>
+    <p:spTree>
+      <p:nvGrpSpPr>
+        <p:cNvPr id="1" name=""/>
+        <p:cNvGrpSpPr/>
+        <p:nvPr/>
+      </p:nvGrpSpPr>
+      <p:grpSpPr>
+        <a:xfrm>
+          <a:off x="0" y="0"/>
+          <a:ext cx="0" cy="0"/>
+          <a:chOff x="0" y="0"/>
+          <a:chExt cx="0" cy="0"/>
+        </a:xfrm>
+      </p:grpSpPr>
+      <p:sp>
+        <p:nvSpPr>
+          <p:cNvPr id="2" name="TextBox 1">
+            <a:extLst>
+              <a:ext uri="{FF2B5EF4-FFF2-40B4-BE49-F238E27FC236}">
                 <a16:creationId xmlns:a16="http://schemas.microsoft.com/office/drawing/2014/main" id="{07C493F1-8F9D-4D11-B9AF-DC6C17705937}"/>
               </a:ext>
             </a:extLst>
@@ -3835,7 +3926,7 @@
 </p:sld>
 </file>
 
-<file path=ppt/slides/slide2.xml><?xml version="1.0" encoding="utf-8"?>
+<file path=ppt/slides/slide3.xml><?xml version="1.0" encoding="utf-8"?>
 <p:sld xmlns:a="http://schemas.openxmlformats.org/drawingml/2006/main" xmlns:r="http://schemas.openxmlformats.org/officeDocument/2006/relationships" xmlns:p="http://schemas.openxmlformats.org/presentationml/2006/main">
   <p:cSld>
     <p:bg>
@@ -4817,7 +4908,7 @@
 </p:sld>
 </file>
 
-<file path=ppt/slides/slide3.xml><?xml version="1.0" encoding="utf-8"?>
+<file path=ppt/slides/slide4.xml><?xml version="1.0" encoding="utf-8"?>
 <p:sld xmlns:a="http://schemas.openxmlformats.org/drawingml/2006/main" xmlns:r="http://schemas.openxmlformats.org/officeDocument/2006/relationships" xmlns:p="http://schemas.openxmlformats.org/presentationml/2006/main">
   <p:cSld>
     <p:spTree>
@@ -5048,7 +5139,7 @@
 </p:sld>
 </file>
 
-<file path=ppt/slides/slide4.xml><?xml version="1.0" encoding="utf-8"?>
+<file path=ppt/slides/slide5.xml><?xml version="1.0" encoding="utf-8"?>
 <p:sld xmlns:a="http://schemas.openxmlformats.org/drawingml/2006/main" xmlns:r="http://schemas.openxmlformats.org/officeDocument/2006/relationships" xmlns:p="http://schemas.openxmlformats.org/presentationml/2006/main">
   <p:cSld>
     <p:spTree>
